--- a/06_relazioni_e_parametri/Slides_v3/04_simulazione-quantistica.pptx
+++ b/06_relazioni_e_parametri/Slides_v3/04_simulazione-quantistica.pptx
@@ -8,7 +8,7 @@
     <p:notesMasterId r:id="rId3"/>
   </p:notesMasterIdLst>
   <p:sldIdLst>
-    <p:sldId id="256" r:id="rId2"/>
+    <p:sldId id="272" r:id="rId2"/>
   </p:sldIdLst>
   <p:sldSz cx="12192000" cy="6858000"/>
   <p:notesSz cx="6858000" cy="12192000"/>
@@ -635,15 +635,7 @@
 
 <file path=ppt/slides/slide1.xml><?xml version="1.0" encoding="utf-8"?>
 <p:sld xmlns:a="http://schemas.openxmlformats.org/drawingml/2006/main" xmlns:r="http://schemas.openxmlformats.org/officeDocument/2006/relationships" xmlns:p="http://schemas.openxmlformats.org/presentationml/2006/main">
-  <p:cSld name="Slide 1">
-    <p:bg>
-      <p:bgPr>
-        <a:solidFill>
-          <a:srgbClr val="FFFFFF"/>
-        </a:solidFill>
-        <a:effectLst/>
-      </p:bgPr>
-    </p:bg>
+  <p:cSld>
     <p:spTree>
       <p:nvGrpSpPr>
         <p:cNvPr id="1" name=""/>
@@ -722,7 +714,7 @@
               <a:buNone/>
             </a:pPr>
             <a:r>
-              <a:rPr lang="en-US" sz="3400" b="1" dirty="0">
+              <a:rPr lang="en-US" sz="3600" b="1" dirty="0">
                 <a:solidFill>
                   <a:srgbClr val="16233A"/>
                 </a:solidFill>
@@ -733,7 +725,7 @@
               <a:t>La </a:t>
             </a:r>
             <a:r>
-              <a:rPr lang="en-US" sz="3400" b="1" dirty="0" err="1">
+              <a:rPr lang="en-US" sz="3600" b="1" dirty="0" err="1">
                 <a:solidFill>
                   <a:srgbClr val="16233A"/>
                 </a:solidFill>
@@ -741,10 +733,10 @@
                 <a:ea typeface="Calibri" pitchFamily="34" charset="-122"/>
                 <a:cs typeface="Calibri" pitchFamily="34" charset="-120"/>
               </a:rPr>
-              <a:t>simulazione</a:t>
-            </a:r>
-            <a:r>
-              <a:rPr lang="en-US" sz="3400" b="1" dirty="0">
+              <a:t>Simulazione</a:t>
+            </a:r>
+            <a:r>
+              <a:rPr lang="en-US" sz="3600" b="1" dirty="0">
                 <a:solidFill>
                   <a:srgbClr val="16233A"/>
                 </a:solidFill>
@@ -752,9 +744,20 @@
                 <a:ea typeface="Calibri" pitchFamily="34" charset="-122"/>
                 <a:cs typeface="Calibri" pitchFamily="34" charset="-120"/>
               </a:rPr>
-              <a:t> quantistica</a:t>
-            </a:r>
-            <a:endParaRPr lang="en-US" sz="3400" dirty="0"/>
+              <a:t> </a:t>
+            </a:r>
+            <a:r>
+              <a:rPr lang="en-US" sz="3600" b="1" dirty="0" err="1">
+                <a:solidFill>
+                  <a:srgbClr val="16233A"/>
+                </a:solidFill>
+                <a:latin typeface="Calibri" pitchFamily="34" charset="0"/>
+                <a:ea typeface="Calibri" pitchFamily="34" charset="-122"/>
+                <a:cs typeface="Calibri" pitchFamily="34" charset="-120"/>
+              </a:rPr>
+              <a:t>Quantistica</a:t>
+            </a:r>
+            <a:endParaRPr lang="en-US" sz="3600" dirty="0"/>
           </a:p>
         </p:txBody>
       </p:sp>
@@ -766,7 +769,7 @@
         </p:nvSpPr>
         <p:spPr>
           <a:xfrm>
-            <a:off x="640080" y="1572768"/>
+            <a:off x="628788" y="1488345"/>
             <a:ext cx="10911535" cy="548640"/>
           </a:xfrm>
           <a:prstGeom prst="roundRect">
@@ -795,7 +798,7 @@
         </p:nvSpPr>
         <p:spPr>
           <a:xfrm>
-            <a:off x="640080" y="1572768"/>
+            <a:off x="628788" y="1488345"/>
             <a:ext cx="10911535" cy="548640"/>
           </a:xfrm>
           <a:prstGeom prst="rect">
@@ -812,7 +815,7 @@
               <a:buNone/>
             </a:pPr>
             <a:r>
-              <a:rPr lang="en-US" sz="1550" b="1" i="1" dirty="0">
+              <a:rPr lang="en-US" sz="2100" b="1" i="1" dirty="0">
                 <a:solidFill>
                   <a:srgbClr val="173A5E"/>
                 </a:solidFill>
@@ -823,7 +826,7 @@
               <a:t>Il </a:t>
             </a:r>
             <a:r>
-              <a:rPr lang="en-US" sz="1550" b="1" i="1" dirty="0" err="1">
+              <a:rPr lang="en-US" sz="2100" b="1" i="1" dirty="0" err="1">
                 <a:solidFill>
                   <a:srgbClr val="173A5E"/>
                 </a:solidFill>
@@ -834,7 +837,7 @@
               <a:t>problema</a:t>
             </a:r>
             <a:r>
-              <a:rPr lang="en-US" sz="1550" b="1" i="1" dirty="0">
+              <a:rPr lang="en-US" sz="2100" b="1" i="1" dirty="0">
                 <a:solidFill>
                   <a:srgbClr val="173A5E"/>
                 </a:solidFill>
@@ -845,7 +848,7 @@
               <a:t> della </a:t>
             </a:r>
             <a:r>
-              <a:rPr lang="en-US" sz="1550" b="1" i="1" dirty="0" err="1">
+              <a:rPr lang="en-US" sz="2100" b="1" i="1" dirty="0" err="1">
                 <a:solidFill>
                   <a:srgbClr val="173A5E"/>
                 </a:solidFill>
@@ -856,7 +859,7 @@
               <a:t>dimensione</a:t>
             </a:r>
             <a:r>
-              <a:rPr lang="en-US" sz="1550" b="1" i="1" dirty="0">
+              <a:rPr lang="en-US" sz="2100" b="1" i="1" dirty="0">
                 <a:solidFill>
                   <a:srgbClr val="173A5E"/>
                 </a:solidFill>
@@ -867,7 +870,7 @@
               <a:t> </a:t>
             </a:r>
             <a:r>
-              <a:rPr lang="en-US" sz="1550" b="1" i="1" dirty="0" err="1">
+              <a:rPr lang="en-US" sz="2100" b="1" i="1" dirty="0" err="1">
                 <a:solidFill>
                   <a:srgbClr val="173A5E"/>
                 </a:solidFill>
@@ -878,7 +881,7 @@
               <a:t>dello</a:t>
             </a:r>
             <a:r>
-              <a:rPr lang="en-US" sz="1550" b="1" i="1" dirty="0">
+              <a:rPr lang="en-US" sz="2100" b="1" i="1" dirty="0">
                 <a:solidFill>
                   <a:srgbClr val="173A5E"/>
                 </a:solidFill>
@@ -889,7 +892,7 @@
               <a:t> </a:t>
             </a:r>
             <a:r>
-              <a:rPr lang="en-US" sz="1550" b="1" i="1" dirty="0" err="1">
+              <a:rPr lang="en-US" sz="2100" b="1" i="1" dirty="0" err="1">
                 <a:solidFill>
                   <a:srgbClr val="173A5E"/>
                 </a:solidFill>
@@ -900,7 +903,7 @@
               <a:t>spazio</a:t>
             </a:r>
             <a:r>
-              <a:rPr lang="en-US" sz="1550" b="1" i="1" dirty="0">
+              <a:rPr lang="en-US" sz="2100" b="1" i="1" dirty="0">
                 <a:solidFill>
                   <a:srgbClr val="173A5E"/>
                 </a:solidFill>
@@ -911,7 +914,7 @@
               <a:t> di Hilbert al </a:t>
             </a:r>
             <a:r>
-              <a:rPr lang="en-US" sz="1550" b="1" i="1" dirty="0" err="1">
+              <a:rPr lang="en-US" sz="2100" b="1" i="1" dirty="0" err="1">
                 <a:solidFill>
                   <a:srgbClr val="173A5E"/>
                 </a:solidFill>
@@ -922,7 +925,7 @@
               <a:t>crescere</a:t>
             </a:r>
             <a:r>
-              <a:rPr lang="en-US" sz="1550" b="1" i="1" dirty="0">
+              <a:rPr lang="en-US" sz="2100" b="1" i="1" dirty="0">
                 <a:solidFill>
                   <a:srgbClr val="173A5E"/>
                 </a:solidFill>
@@ -933,7 +936,7 @@
               <a:t> di N ha </a:t>
             </a:r>
             <a:r>
-              <a:rPr lang="en-US" sz="1550" b="1" i="1" dirty="0" err="1">
+              <a:rPr lang="en-US" sz="2100" b="1" i="1" dirty="0" err="1">
                 <a:solidFill>
                   <a:srgbClr val="173A5E"/>
                 </a:solidFill>
@@ -944,7 +947,7 @@
               <a:t>una</a:t>
             </a:r>
             <a:r>
-              <a:rPr lang="en-US" sz="1550" b="1" i="1" dirty="0">
+              <a:rPr lang="en-US" sz="2100" b="1" i="1" dirty="0">
                 <a:solidFill>
                   <a:srgbClr val="173A5E"/>
                 </a:solidFill>
@@ -955,7 +958,7 @@
               <a:t> </a:t>
             </a:r>
             <a:r>
-              <a:rPr lang="en-US" sz="1550" b="1" i="1" dirty="0" err="1">
+              <a:rPr lang="en-US" sz="2100" b="1" i="1" dirty="0" err="1">
                 <a:solidFill>
                   <a:srgbClr val="173A5E"/>
                 </a:solidFill>
@@ -965,7 +968,7 @@
               </a:rPr>
               <a:t>risposta</a:t>
             </a:r>
-            <a:endParaRPr lang="en-US" sz="1550" dirty="0"/>
+            <a:endParaRPr lang="en-US" sz="2100" dirty="0"/>
           </a:p>
         </p:txBody>
       </p:sp>
@@ -1009,8 +1012,8 @@
           </a:p>
         </p:txBody>
       </p:sp>
-      <mc:AlternateContent xmlns:mc="http://schemas.openxmlformats.org/markup-compatibility/2006">
-        <mc:Choice xmlns:a14="http://schemas.microsoft.com/office/drawing/2010/main" Requires="a14">
+      <mc:AlternateContent xmlns:mc="http://schemas.openxmlformats.org/markup-compatibility/2006" xmlns:a14="http://schemas.microsoft.com/office/drawing/2010/main">
+        <mc:Choice Requires="a14">
           <p:sp>
             <p:nvSpPr>
               <p:cNvPr id="10" name="Text 8"/>
@@ -1189,7 +1192,7 @@
             </p:txBody>
           </p:sp>
         </mc:Choice>
-        <mc:Fallback>
+        <mc:Fallback xmlns="">
           <p:sp>
             <p:nvSpPr>
               <p:cNvPr id="10" name="Text 8"/>
@@ -1229,8 +1232,8 @@
           </p:sp>
         </mc:Fallback>
       </mc:AlternateContent>
-      <mc:AlternateContent xmlns:mc="http://schemas.openxmlformats.org/markup-compatibility/2006">
-        <mc:Choice xmlns:a14="http://schemas.microsoft.com/office/drawing/2010/main" Requires="a14">
+      <mc:AlternateContent xmlns:mc="http://schemas.openxmlformats.org/markup-compatibility/2006" xmlns:a14="http://schemas.microsoft.com/office/drawing/2010/main">
+        <mc:Choice Requires="a14">
           <p:sp>
             <p:nvSpPr>
               <p:cNvPr id="16" name="TextBox 15">
@@ -2085,7 +2088,7 @@
             </p:txBody>
           </p:sp>
         </mc:Choice>
-        <mc:Fallback>
+        <mc:Fallback xmlns="">
           <p:sp>
             <p:nvSpPr>
               <p:cNvPr id="16" name="TextBox 15">
